--- a/How to play quiz strike - simplified.pptx
+++ b/How to play quiz strike - simplified.pptx
@@ -6530,7 +6530,7 @@
         </p:spPr>
         <p:txBody>
           <a:bodyPr>
-            <a:normAutofit fontScale="90311"/>
+            <a:normAutofit fontScale="97811" lnSpcReduction="10000"/>
           </a:bodyPr>
           <a:lstStyle/>
           <a:p>
@@ -6951,7 +6951,7 @@
         </p:spPr>
         <p:txBody>
           <a:bodyPr>
-            <a:normAutofit lnSpcReduction="10000"/>
+            <a:normAutofit/>
           </a:bodyPr>
           <a:lstStyle/>
           <a:p>
